--- a/docs/admin/退院集中対策_2026-04-24.pptx
+++ b/docs/admin/退院集中対策_2026-04-24.pptx
@@ -5,18 +5,18 @@
     <p:sldMasterId id="2147483648" r:id="rId1"/>
   </p:sldMasterIdLst>
   <p:sldIdLst>
-    <p:sldId id="256" r:id="rId7"/>
-    <p:sldId id="257" r:id="rId8"/>
-    <p:sldId id="258" r:id="rId9"/>
-    <p:sldId id="259" r:id="rId10"/>
-    <p:sldId id="260" r:id="rId11"/>
-    <p:sldId id="261" r:id="rId12"/>
-    <p:sldId id="262" r:id="rId13"/>
-    <p:sldId id="263" r:id="rId14"/>
-    <p:sldId id="264" r:id="rId15"/>
-    <p:sldId id="265" r:id="rId16"/>
+    <p:sldId id="256" r:id="rId2"/>
+    <p:sldId id="257" r:id="rId3"/>
+    <p:sldId id="258" r:id="rId4"/>
+    <p:sldId id="259" r:id="rId5"/>
+    <p:sldId id="260" r:id="rId6"/>
+    <p:sldId id="261" r:id="rId7"/>
+    <p:sldId id="262" r:id="rId8"/>
+    <p:sldId id="263" r:id="rId9"/>
+    <p:sldId id="264" r:id="rId10"/>
+    <p:sldId id="265" r:id="rId11"/>
   </p:sldIdLst>
-  <p:sldSz cx="12191695" cy="6858000" type="screen4x3"/>
+  <p:sldSz cx="12192000" cy="6858000"/>
   <p:notesSz cx="6858000" cy="9144000"/>
   <p:defaultTextStyle>
     <a:defPPr>
@@ -113,6 +113,22 @@
       </a:defRPr>
     </a:lvl9pPr>
   </p:defaultTextStyle>
+  <p:extLst>
+    <p:ext uri="{EFAFB233-063F-42B5-8137-9DF3F51BA10A}">
+      <p15:sldGuideLst xmlns:p15="http://schemas.microsoft.com/office/powerpoint/2012/main">
+        <p15:guide id="1" orient="horz" pos="2160">
+          <p15:clr>
+            <a:srgbClr val="A4A3A4"/>
+          </p15:clr>
+        </p15:guide>
+        <p15:guide id="2" pos="2880">
+          <p15:clr>
+            <a:srgbClr val="A4A3A4"/>
+          </p15:clr>
+        </p15:guide>
+      </p15:sldGuideLst>
+    </p:ext>
+  </p:extLst>
 </p:presentation>
 </file>
 
@@ -154,10 +170,9 @@
           <a:lstStyle/>
           <a:p>
             <a:r>
-              <a:rPr lang="en-US" smtClean="0"/>
+              <a:rPr lang="en-US"/>
               <a:t>Click to edit Master title style</a:t>
             </a:r>
-            <a:endParaRPr lang="en-US"/>
           </a:p>
         </p:txBody>
       </p:sp>
@@ -273,10 +288,9 @@
           </a:lstStyle>
           <a:p>
             <a:r>
-              <a:rPr lang="en-US" smtClean="0"/>
+              <a:rPr lang="en-US"/>
               <a:t>Click to edit Master subtitle style</a:t>
             </a:r>
-            <a:endParaRPr lang="en-US"/>
           </a:p>
         </p:txBody>
       </p:sp>
@@ -297,7 +311,7 @@
           <a:p>
             <a:fld id="{5BCAD085-E8A6-8845-BD4E-CB4CCA059FC4}" type="datetimeFigureOut">
               <a:rPr lang="en-US" smtClean="0"/>
-              <a:t>1/27/13</a:t>
+              <a:t>4/25/26</a:t>
             </a:fld>
             <a:endParaRPr lang="en-US"/>
           </a:p>
@@ -391,10 +405,9 @@
           <a:lstStyle/>
           <a:p>
             <a:r>
-              <a:rPr lang="en-US" smtClean="0"/>
+              <a:rPr lang="en-US"/>
               <a:t>Click to edit Master title style</a:t>
             </a:r>
-            <a:endParaRPr lang="en-US"/>
           </a:p>
         </p:txBody>
       </p:sp>
@@ -415,38 +428,37 @@
           <a:p>
             <a:pPr lvl="0"/>
             <a:r>
-              <a:rPr lang="en-US" smtClean="0"/>
+              <a:rPr lang="en-US"/>
               <a:t>Click to edit Master text styles</a:t>
             </a:r>
           </a:p>
           <a:p>
             <a:pPr lvl="1"/>
             <a:r>
-              <a:rPr lang="en-US" smtClean="0"/>
+              <a:rPr lang="en-US"/>
               <a:t>Second level</a:t>
             </a:r>
           </a:p>
           <a:p>
             <a:pPr lvl="2"/>
             <a:r>
-              <a:rPr lang="en-US" smtClean="0"/>
+              <a:rPr lang="en-US"/>
               <a:t>Third level</a:t>
             </a:r>
           </a:p>
           <a:p>
             <a:pPr lvl="3"/>
             <a:r>
-              <a:rPr lang="en-US" smtClean="0"/>
+              <a:rPr lang="en-US"/>
               <a:t>Fourth level</a:t>
             </a:r>
           </a:p>
           <a:p>
             <a:pPr lvl="4"/>
             <a:r>
-              <a:rPr lang="en-US" smtClean="0"/>
+              <a:rPr lang="en-US"/>
               <a:t>Fifth level</a:t>
             </a:r>
-            <a:endParaRPr lang="en-US"/>
           </a:p>
         </p:txBody>
       </p:sp>
@@ -467,7 +479,7 @@
           <a:p>
             <a:fld id="{5BCAD085-E8A6-8845-BD4E-CB4CCA059FC4}" type="datetimeFigureOut">
               <a:rPr lang="en-US" smtClean="0"/>
-              <a:t>1/27/13</a:t>
+              <a:t>4/25/26</a:t>
             </a:fld>
             <a:endParaRPr lang="en-US"/>
           </a:p>
@@ -566,10 +578,9 @@
           <a:lstStyle/>
           <a:p>
             <a:r>
-              <a:rPr lang="en-US" smtClean="0"/>
+              <a:rPr lang="en-US"/>
               <a:t>Click to edit Master title style</a:t>
             </a:r>
-            <a:endParaRPr lang="en-US"/>
           </a:p>
         </p:txBody>
       </p:sp>
@@ -595,38 +606,37 @@
           <a:p>
             <a:pPr lvl="0"/>
             <a:r>
-              <a:rPr lang="en-US" smtClean="0"/>
+              <a:rPr lang="en-US"/>
               <a:t>Click to edit Master text styles</a:t>
             </a:r>
           </a:p>
           <a:p>
             <a:pPr lvl="1"/>
             <a:r>
-              <a:rPr lang="en-US" smtClean="0"/>
+              <a:rPr lang="en-US"/>
               <a:t>Second level</a:t>
             </a:r>
           </a:p>
           <a:p>
             <a:pPr lvl="2"/>
             <a:r>
-              <a:rPr lang="en-US" smtClean="0"/>
+              <a:rPr lang="en-US"/>
               <a:t>Third level</a:t>
             </a:r>
           </a:p>
           <a:p>
             <a:pPr lvl="3"/>
             <a:r>
-              <a:rPr lang="en-US" smtClean="0"/>
+              <a:rPr lang="en-US"/>
               <a:t>Fourth level</a:t>
             </a:r>
           </a:p>
           <a:p>
             <a:pPr lvl="4"/>
             <a:r>
-              <a:rPr lang="en-US" smtClean="0"/>
+              <a:rPr lang="en-US"/>
               <a:t>Fifth level</a:t>
             </a:r>
-            <a:endParaRPr lang="en-US"/>
           </a:p>
         </p:txBody>
       </p:sp>
@@ -647,7 +657,7 @@
           <a:p>
             <a:fld id="{5BCAD085-E8A6-8845-BD4E-CB4CCA059FC4}" type="datetimeFigureOut">
               <a:rPr lang="en-US" smtClean="0"/>
-              <a:t>1/27/13</a:t>
+              <a:t>4/25/26</a:t>
             </a:fld>
             <a:endParaRPr lang="en-US"/>
           </a:p>
@@ -741,10 +751,9 @@
           <a:lstStyle/>
           <a:p>
             <a:r>
-              <a:rPr lang="en-US" smtClean="0"/>
+              <a:rPr lang="en-US"/>
               <a:t>Click to edit Master title style</a:t>
             </a:r>
-            <a:endParaRPr lang="en-US"/>
           </a:p>
         </p:txBody>
       </p:sp>
@@ -765,38 +774,37 @@
           <a:p>
             <a:pPr lvl="0"/>
             <a:r>
-              <a:rPr lang="en-US" smtClean="0"/>
+              <a:rPr lang="en-US"/>
               <a:t>Click to edit Master text styles</a:t>
             </a:r>
           </a:p>
           <a:p>
             <a:pPr lvl="1"/>
             <a:r>
-              <a:rPr lang="en-US" smtClean="0"/>
+              <a:rPr lang="en-US"/>
               <a:t>Second level</a:t>
             </a:r>
           </a:p>
           <a:p>
             <a:pPr lvl="2"/>
             <a:r>
-              <a:rPr lang="en-US" smtClean="0"/>
+              <a:rPr lang="en-US"/>
               <a:t>Third level</a:t>
             </a:r>
           </a:p>
           <a:p>
             <a:pPr lvl="3"/>
             <a:r>
-              <a:rPr lang="en-US" smtClean="0"/>
+              <a:rPr lang="en-US"/>
               <a:t>Fourth level</a:t>
             </a:r>
           </a:p>
           <a:p>
             <a:pPr lvl="4"/>
             <a:r>
-              <a:rPr lang="en-US" smtClean="0"/>
+              <a:rPr lang="en-US"/>
               <a:t>Fifth level</a:t>
             </a:r>
-            <a:endParaRPr lang="en-US"/>
           </a:p>
         </p:txBody>
       </p:sp>
@@ -817,7 +825,7 @@
           <a:p>
             <a:fld id="{5BCAD085-E8A6-8845-BD4E-CB4CCA059FC4}" type="datetimeFigureOut">
               <a:rPr lang="en-US" smtClean="0"/>
-              <a:t>1/27/13</a:t>
+              <a:t>4/25/26</a:t>
             </a:fld>
             <a:endParaRPr lang="en-US"/>
           </a:p>
@@ -920,10 +928,9 @@
           </a:lstStyle>
           <a:p>
             <a:r>
-              <a:rPr lang="en-US" smtClean="0"/>
+              <a:rPr lang="en-US"/>
               <a:t>Click to edit Master title style</a:t>
             </a:r>
-            <a:endParaRPr lang="en-US"/>
           </a:p>
         </p:txBody>
       </p:sp>
@@ -1040,7 +1047,7 @@
           <a:p>
             <a:pPr lvl="0"/>
             <a:r>
-              <a:rPr lang="en-US" smtClean="0"/>
+              <a:rPr lang="en-US"/>
               <a:t>Click to edit Master text styles</a:t>
             </a:r>
           </a:p>
@@ -1063,7 +1070,7 @@
           <a:p>
             <a:fld id="{5BCAD085-E8A6-8845-BD4E-CB4CCA059FC4}" type="datetimeFigureOut">
               <a:rPr lang="en-US" smtClean="0"/>
-              <a:t>1/27/13</a:t>
+              <a:t>4/25/26</a:t>
             </a:fld>
             <a:endParaRPr lang="en-US"/>
           </a:p>
@@ -1157,10 +1164,9 @@
           <a:lstStyle/>
           <a:p>
             <a:r>
-              <a:rPr lang="en-US" smtClean="0"/>
+              <a:rPr lang="en-US"/>
               <a:t>Click to edit Master title style</a:t>
             </a:r>
-            <a:endParaRPr lang="en-US"/>
           </a:p>
         </p:txBody>
       </p:sp>
@@ -1214,38 +1220,37 @@
           <a:p>
             <a:pPr lvl="0"/>
             <a:r>
-              <a:rPr lang="en-US" smtClean="0"/>
+              <a:rPr lang="en-US"/>
               <a:t>Click to edit Master text styles</a:t>
             </a:r>
           </a:p>
           <a:p>
             <a:pPr lvl="1"/>
             <a:r>
-              <a:rPr lang="en-US" smtClean="0"/>
+              <a:rPr lang="en-US"/>
               <a:t>Second level</a:t>
             </a:r>
           </a:p>
           <a:p>
             <a:pPr lvl="2"/>
             <a:r>
-              <a:rPr lang="en-US" smtClean="0"/>
+              <a:rPr lang="en-US"/>
               <a:t>Third level</a:t>
             </a:r>
           </a:p>
           <a:p>
             <a:pPr lvl="3"/>
             <a:r>
-              <a:rPr lang="en-US" smtClean="0"/>
+              <a:rPr lang="en-US"/>
               <a:t>Fourth level</a:t>
             </a:r>
           </a:p>
           <a:p>
             <a:pPr lvl="4"/>
             <a:r>
-              <a:rPr lang="en-US" smtClean="0"/>
+              <a:rPr lang="en-US"/>
               <a:t>Fifth level</a:t>
             </a:r>
-            <a:endParaRPr lang="en-US"/>
           </a:p>
         </p:txBody>
       </p:sp>
@@ -1299,38 +1304,37 @@
           <a:p>
             <a:pPr lvl="0"/>
             <a:r>
-              <a:rPr lang="en-US" smtClean="0"/>
+              <a:rPr lang="en-US"/>
               <a:t>Click to edit Master text styles</a:t>
             </a:r>
           </a:p>
           <a:p>
             <a:pPr lvl="1"/>
             <a:r>
-              <a:rPr lang="en-US" smtClean="0"/>
+              <a:rPr lang="en-US"/>
               <a:t>Second level</a:t>
             </a:r>
           </a:p>
           <a:p>
             <a:pPr lvl="2"/>
             <a:r>
-              <a:rPr lang="en-US" smtClean="0"/>
+              <a:rPr lang="en-US"/>
               <a:t>Third level</a:t>
             </a:r>
           </a:p>
           <a:p>
             <a:pPr lvl="3"/>
             <a:r>
-              <a:rPr lang="en-US" smtClean="0"/>
+              <a:rPr lang="en-US"/>
               <a:t>Fourth level</a:t>
             </a:r>
           </a:p>
           <a:p>
             <a:pPr lvl="4"/>
             <a:r>
-              <a:rPr lang="en-US" smtClean="0"/>
+              <a:rPr lang="en-US"/>
               <a:t>Fifth level</a:t>
             </a:r>
-            <a:endParaRPr lang="en-US"/>
           </a:p>
         </p:txBody>
       </p:sp>
@@ -1351,7 +1355,7 @@
           <a:p>
             <a:fld id="{5BCAD085-E8A6-8845-BD4E-CB4CCA059FC4}" type="datetimeFigureOut">
               <a:rPr lang="en-US" smtClean="0"/>
-              <a:t>1/27/13</a:t>
+              <a:t>4/25/26</a:t>
             </a:fld>
             <a:endParaRPr lang="en-US"/>
           </a:p>
@@ -1449,10 +1453,9 @@
           </a:lstStyle>
           <a:p>
             <a:r>
-              <a:rPr lang="en-US" smtClean="0"/>
+              <a:rPr lang="en-US"/>
               <a:t>Click to edit Master title style</a:t>
             </a:r>
-            <a:endParaRPr lang="en-US"/>
           </a:p>
         </p:txBody>
       </p:sp>
@@ -1515,7 +1518,7 @@
           <a:p>
             <a:pPr lvl="0"/>
             <a:r>
-              <a:rPr lang="en-US" smtClean="0"/>
+              <a:rPr lang="en-US"/>
               <a:t>Click to edit Master text styles</a:t>
             </a:r>
           </a:p>
@@ -1571,38 +1574,37 @@
           <a:p>
             <a:pPr lvl="0"/>
             <a:r>
-              <a:rPr lang="en-US" smtClean="0"/>
+              <a:rPr lang="en-US"/>
               <a:t>Click to edit Master text styles</a:t>
             </a:r>
           </a:p>
           <a:p>
             <a:pPr lvl="1"/>
             <a:r>
-              <a:rPr lang="en-US" smtClean="0"/>
+              <a:rPr lang="en-US"/>
               <a:t>Second level</a:t>
             </a:r>
           </a:p>
           <a:p>
             <a:pPr lvl="2"/>
             <a:r>
-              <a:rPr lang="en-US" smtClean="0"/>
+              <a:rPr lang="en-US"/>
               <a:t>Third level</a:t>
             </a:r>
           </a:p>
           <a:p>
             <a:pPr lvl="3"/>
             <a:r>
-              <a:rPr lang="en-US" smtClean="0"/>
+              <a:rPr lang="en-US"/>
               <a:t>Fourth level</a:t>
             </a:r>
           </a:p>
           <a:p>
             <a:pPr lvl="4"/>
             <a:r>
-              <a:rPr lang="en-US" smtClean="0"/>
+              <a:rPr lang="en-US"/>
               <a:t>Fifth level</a:t>
             </a:r>
-            <a:endParaRPr lang="en-US"/>
           </a:p>
         </p:txBody>
       </p:sp>
@@ -1665,7 +1667,7 @@
           <a:p>
             <a:pPr lvl="0"/>
             <a:r>
-              <a:rPr lang="en-US" smtClean="0"/>
+              <a:rPr lang="en-US"/>
               <a:t>Click to edit Master text styles</a:t>
             </a:r>
           </a:p>
@@ -1721,38 +1723,37 @@
           <a:p>
             <a:pPr lvl="0"/>
             <a:r>
-              <a:rPr lang="en-US" smtClean="0"/>
+              <a:rPr lang="en-US"/>
               <a:t>Click to edit Master text styles</a:t>
             </a:r>
           </a:p>
           <a:p>
             <a:pPr lvl="1"/>
             <a:r>
-              <a:rPr lang="en-US" smtClean="0"/>
+              <a:rPr lang="en-US"/>
               <a:t>Second level</a:t>
             </a:r>
           </a:p>
           <a:p>
             <a:pPr lvl="2"/>
             <a:r>
-              <a:rPr lang="en-US" smtClean="0"/>
+              <a:rPr lang="en-US"/>
               <a:t>Third level</a:t>
             </a:r>
           </a:p>
           <a:p>
             <a:pPr lvl="3"/>
             <a:r>
-              <a:rPr lang="en-US" smtClean="0"/>
+              <a:rPr lang="en-US"/>
               <a:t>Fourth level</a:t>
             </a:r>
           </a:p>
           <a:p>
             <a:pPr lvl="4"/>
             <a:r>
-              <a:rPr lang="en-US" smtClean="0"/>
+              <a:rPr lang="en-US"/>
               <a:t>Fifth level</a:t>
             </a:r>
-            <a:endParaRPr lang="en-US"/>
           </a:p>
         </p:txBody>
       </p:sp>
@@ -1773,7 +1774,7 @@
           <a:p>
             <a:fld id="{5BCAD085-E8A6-8845-BD4E-CB4CCA059FC4}" type="datetimeFigureOut">
               <a:rPr lang="en-US" smtClean="0"/>
-              <a:t>1/27/13</a:t>
+              <a:t>4/25/26</a:t>
             </a:fld>
             <a:endParaRPr lang="en-US"/>
           </a:p>
@@ -1867,10 +1868,9 @@
           <a:lstStyle/>
           <a:p>
             <a:r>
-              <a:rPr lang="en-US" smtClean="0"/>
+              <a:rPr lang="en-US"/>
               <a:t>Click to edit Master title style</a:t>
             </a:r>
-            <a:endParaRPr lang="en-US"/>
           </a:p>
         </p:txBody>
       </p:sp>
@@ -1891,7 +1891,7 @@
           <a:p>
             <a:fld id="{5BCAD085-E8A6-8845-BD4E-CB4CCA059FC4}" type="datetimeFigureOut">
               <a:rPr lang="en-US" smtClean="0"/>
-              <a:t>1/27/13</a:t>
+              <a:t>4/25/26</a:t>
             </a:fld>
             <a:endParaRPr lang="en-US"/>
           </a:p>
@@ -1986,7 +1986,7 @@
           <a:p>
             <a:fld id="{5BCAD085-E8A6-8845-BD4E-CB4CCA059FC4}" type="datetimeFigureOut">
               <a:rPr lang="en-US" smtClean="0"/>
-              <a:t>1/27/13</a:t>
+              <a:t>4/25/26</a:t>
             </a:fld>
             <a:endParaRPr lang="en-US"/>
           </a:p>
@@ -2089,10 +2089,9 @@
           </a:lstStyle>
           <a:p>
             <a:r>
-              <a:rPr lang="en-US" smtClean="0"/>
+              <a:rPr lang="en-US"/>
               <a:t>Click to edit Master title style</a:t>
             </a:r>
-            <a:endParaRPr lang="en-US"/>
           </a:p>
         </p:txBody>
       </p:sp>
@@ -2146,38 +2145,37 @@
           <a:p>
             <a:pPr lvl="0"/>
             <a:r>
-              <a:rPr lang="en-US" smtClean="0"/>
+              <a:rPr lang="en-US"/>
               <a:t>Click to edit Master text styles</a:t>
             </a:r>
           </a:p>
           <a:p>
             <a:pPr lvl="1"/>
             <a:r>
-              <a:rPr lang="en-US" smtClean="0"/>
+              <a:rPr lang="en-US"/>
               <a:t>Second level</a:t>
             </a:r>
           </a:p>
           <a:p>
             <a:pPr lvl="2"/>
             <a:r>
-              <a:rPr lang="en-US" smtClean="0"/>
+              <a:rPr lang="en-US"/>
               <a:t>Third level</a:t>
             </a:r>
           </a:p>
           <a:p>
             <a:pPr lvl="3"/>
             <a:r>
-              <a:rPr lang="en-US" smtClean="0"/>
+              <a:rPr lang="en-US"/>
               <a:t>Fourth level</a:t>
             </a:r>
           </a:p>
           <a:p>
             <a:pPr lvl="4"/>
             <a:r>
-              <a:rPr lang="en-US" smtClean="0"/>
+              <a:rPr lang="en-US"/>
               <a:t>Fifth level</a:t>
             </a:r>
-            <a:endParaRPr lang="en-US"/>
           </a:p>
         </p:txBody>
       </p:sp>
@@ -2240,7 +2238,7 @@
           <a:p>
             <a:pPr lvl="0"/>
             <a:r>
-              <a:rPr lang="en-US" smtClean="0"/>
+              <a:rPr lang="en-US"/>
               <a:t>Click to edit Master text styles</a:t>
             </a:r>
           </a:p>
@@ -2263,7 +2261,7 @@
           <a:p>
             <a:fld id="{5BCAD085-E8A6-8845-BD4E-CB4CCA059FC4}" type="datetimeFigureOut">
               <a:rPr lang="en-US" smtClean="0"/>
-              <a:t>1/27/13</a:t>
+              <a:t>4/25/26</a:t>
             </a:fld>
             <a:endParaRPr lang="en-US"/>
           </a:p>
@@ -2366,10 +2364,9 @@
           </a:lstStyle>
           <a:p>
             <a:r>
-              <a:rPr lang="en-US" smtClean="0"/>
+              <a:rPr lang="en-US"/>
               <a:t>Click to edit Master title style</a:t>
             </a:r>
-            <a:endParaRPr lang="en-US"/>
           </a:p>
         </p:txBody>
       </p:sp>
@@ -2493,7 +2490,7 @@
           <a:p>
             <a:pPr lvl="0"/>
             <a:r>
-              <a:rPr lang="en-US" smtClean="0"/>
+              <a:rPr lang="en-US"/>
               <a:t>Click to edit Master text styles</a:t>
             </a:r>
           </a:p>
@@ -2516,7 +2513,7 @@
           <a:p>
             <a:fld id="{5BCAD085-E8A6-8845-BD4E-CB4CCA059FC4}" type="datetimeFigureOut">
               <a:rPr lang="en-US" smtClean="0"/>
-              <a:t>1/27/13</a:t>
+              <a:t>4/25/26</a:t>
             </a:fld>
             <a:endParaRPr lang="en-US"/>
           </a:p>
@@ -2625,10 +2622,9 @@
           <a:lstStyle/>
           <a:p>
             <a:r>
-              <a:rPr lang="en-US" smtClean="0"/>
+              <a:rPr lang="en-US"/>
               <a:t>Click to edit Master title style</a:t>
             </a:r>
-            <a:endParaRPr lang="en-US"/>
           </a:p>
         </p:txBody>
       </p:sp>
@@ -2659,38 +2655,37 @@
           <a:p>
             <a:pPr lvl="0"/>
             <a:r>
-              <a:rPr lang="en-US" smtClean="0"/>
+              <a:rPr lang="en-US"/>
               <a:t>Click to edit Master text styles</a:t>
             </a:r>
           </a:p>
           <a:p>
             <a:pPr lvl="1"/>
             <a:r>
-              <a:rPr lang="en-US" smtClean="0"/>
+              <a:rPr lang="en-US"/>
               <a:t>Second level</a:t>
             </a:r>
           </a:p>
           <a:p>
             <a:pPr lvl="2"/>
             <a:r>
-              <a:rPr lang="en-US" smtClean="0"/>
+              <a:rPr lang="en-US"/>
               <a:t>Third level</a:t>
             </a:r>
           </a:p>
           <a:p>
             <a:pPr lvl="3"/>
             <a:r>
-              <a:rPr lang="en-US" smtClean="0"/>
+              <a:rPr lang="en-US"/>
               <a:t>Fourth level</a:t>
             </a:r>
           </a:p>
           <a:p>
             <a:pPr lvl="4"/>
             <a:r>
-              <a:rPr lang="en-US" smtClean="0"/>
+              <a:rPr lang="en-US"/>
               <a:t>Fifth level</a:t>
             </a:r>
-            <a:endParaRPr lang="en-US"/>
           </a:p>
         </p:txBody>
       </p:sp>
@@ -2729,7 +2724,7 @@
           <a:p>
             <a:fld id="{5BCAD085-E8A6-8845-BD4E-CB4CCA059FC4}" type="datetimeFigureOut">
               <a:rPr lang="en-US" smtClean="0"/>
-              <a:t>1/27/13</a:t>
+              <a:t>4/25/26</a:t>
             </a:fld>
             <a:endParaRPr lang="en-US"/>
           </a:p>
@@ -3088,7 +3083,7 @@
 </file>
 
 <file path=ppt/slides/slide1.xml><?xml version="1.0" encoding="utf-8"?>
-<p:sld xmlns:a="http://schemas.openxmlformats.org/drawingml/2006/main" xmlns:p="http://schemas.openxmlformats.org/presentationml/2006/main" xmlns:r="http://schemas.openxmlformats.org/officeDocument/2006/relationships">
+<p:sld xmlns:a="http://schemas.openxmlformats.org/drawingml/2006/main" xmlns:r="http://schemas.openxmlformats.org/officeDocument/2006/relationships" xmlns:p="http://schemas.openxmlformats.org/presentationml/2006/main">
   <p:cSld>
     <p:spTree>
       <p:nvGrpSpPr>
@@ -3096,7 +3091,14 @@
         <p:cNvGrpSpPr/>
         <p:nvPr/>
       </p:nvGrpSpPr>
-      <p:grpSpPr/>
+      <p:grpSpPr>
+        <a:xfrm>
+          <a:off x="0" y="0"/>
+          <a:ext cx="0" cy="0"/>
+          <a:chOff x="0" y="0"/>
+          <a:chExt cx="0" cy="0"/>
+        </a:xfrm>
+      </p:grpSpPr>
       <p:sp>
         <p:nvSpPr>
           <p:cNvPr id="2" name="Rounded Rectangle 1"/>
@@ -3138,6 +3140,7 @@
           <a:lstStyle/>
           <a:p>
             <a:pPr algn="ctr"/>
+            <a:endParaRPr/>
           </a:p>
         </p:txBody>
       </p:sp>
@@ -3182,6 +3185,7 @@
           <a:lstStyle/>
           <a:p>
             <a:pPr algn="ctr"/>
+            <a:endParaRPr/>
           </a:p>
         </p:txBody>
       </p:sp>
@@ -3330,7 +3334,7 @@
 </file>
 
 <file path=ppt/slides/slide10.xml><?xml version="1.0" encoding="utf-8"?>
-<p:sld xmlns:a="http://schemas.openxmlformats.org/drawingml/2006/main" xmlns:p="http://schemas.openxmlformats.org/presentationml/2006/main" xmlns:r="http://schemas.openxmlformats.org/officeDocument/2006/relationships">
+<p:sld xmlns:a="http://schemas.openxmlformats.org/drawingml/2006/main" xmlns:r="http://schemas.openxmlformats.org/officeDocument/2006/relationships" xmlns:p="http://schemas.openxmlformats.org/presentationml/2006/main">
   <p:cSld>
     <p:spTree>
       <p:nvGrpSpPr>
@@ -3338,7 +3342,14 @@
         <p:cNvGrpSpPr/>
         <p:nvPr/>
       </p:nvGrpSpPr>
-      <p:grpSpPr/>
+      <p:grpSpPr>
+        <a:xfrm>
+          <a:off x="0" y="0"/>
+          <a:ext cx="0" cy="0"/>
+          <a:chOff x="0" y="0"/>
+          <a:chExt cx="0" cy="0"/>
+        </a:xfrm>
+      </p:grpSpPr>
       <p:sp>
         <p:nvSpPr>
           <p:cNvPr id="2" name="Rounded Rectangle 1"/>
@@ -3380,6 +3391,7 @@
           <a:lstStyle/>
           <a:p>
             <a:pPr algn="ctr"/>
+            <a:endParaRPr/>
           </a:p>
         </p:txBody>
       </p:sp>
@@ -3460,6 +3472,7 @@
           <a:lstStyle/>
           <a:p>
             <a:pPr algn="ctr"/>
+            <a:endParaRPr/>
           </a:p>
         </p:txBody>
       </p:sp>
@@ -3585,6 +3598,7 @@
           <a:lstStyle/>
           <a:p>
             <a:pPr algn="ctr"/>
+            <a:endParaRPr/>
           </a:p>
         </p:txBody>
       </p:sp>
@@ -3710,6 +3724,7 @@
           <a:lstStyle/>
           <a:p>
             <a:pPr algn="ctr"/>
+            <a:endParaRPr/>
           </a:p>
         </p:txBody>
       </p:sp>
@@ -3833,6 +3848,7 @@
           <a:lstStyle/>
           <a:p>
             <a:pPr algn="ctr"/>
+            <a:endParaRPr/>
           </a:p>
         </p:txBody>
       </p:sp>
@@ -3981,7 +3997,7 @@
 </file>
 
 <file path=ppt/slides/slide2.xml><?xml version="1.0" encoding="utf-8"?>
-<p:sld xmlns:a="http://schemas.openxmlformats.org/drawingml/2006/main" xmlns:p="http://schemas.openxmlformats.org/presentationml/2006/main" xmlns:r="http://schemas.openxmlformats.org/officeDocument/2006/relationships">
+<p:sld xmlns:a="http://schemas.openxmlformats.org/drawingml/2006/main" xmlns:r="http://schemas.openxmlformats.org/officeDocument/2006/relationships" xmlns:p="http://schemas.openxmlformats.org/presentationml/2006/main">
   <p:cSld>
     <p:spTree>
       <p:nvGrpSpPr>
@@ -3989,7 +4005,14 @@
         <p:cNvGrpSpPr/>
         <p:nvPr/>
       </p:nvGrpSpPr>
-      <p:grpSpPr/>
+      <p:grpSpPr>
+        <a:xfrm>
+          <a:off x="0" y="0"/>
+          <a:ext cx="0" cy="0"/>
+          <a:chOff x="0" y="0"/>
+          <a:chExt cx="0" cy="0"/>
+        </a:xfrm>
+      </p:grpSpPr>
       <p:sp>
         <p:nvSpPr>
           <p:cNvPr id="2" name="TextBox 1"/>
@@ -3999,28 +4022,49 @@
         <p:spPr>
           <a:xfrm>
             <a:off x="457200" y="274320"/>
-            <a:ext cx="11247120" cy="822960"/>
-          </a:xfrm>
-          <a:prstGeom prst="rect">
-            <a:avLst/>
-          </a:prstGeom>
-          <a:noFill/>
-        </p:spPr>
-        <p:txBody>
-          <a:bodyPr wrap="square">
-            <a:spAutoFit/>
-          </a:bodyPr>
-          <a:lstStyle/>
-          <a:p>
-            <a:pPr algn="l"/>
-            <a:r>
-              <a:rPr sz="3200" b="1">
+            <a:ext cx="11247120" cy="584775"/>
+          </a:xfrm>
+          <a:prstGeom prst="rect">
+            <a:avLst/>
+          </a:prstGeom>
+          <a:noFill/>
+        </p:spPr>
+        <p:txBody>
+          <a:bodyPr wrap="square">
+            <a:spAutoFit/>
+          </a:bodyPr>
+          <a:lstStyle/>
+          <a:p>
+            <a:pPr algn="l"/>
+            <a:r>
+              <a:rPr sz="3200" b="1" dirty="0">
                 <a:solidFill>
                   <a:srgbClr val="374151"/>
                 </a:solidFill>
               </a:rPr>
-              <a:t>🚨 今日のカンファで起きたこと</a:t>
-            </a:r>
+              <a:t>🚨 </a:t>
+            </a:r>
+            <a:r>
+              <a:rPr lang="ja-JP" altLang="en-US" sz="3200" b="1">
+                <a:solidFill>
+                  <a:srgbClr val="374151"/>
+                </a:solidFill>
+              </a:rPr>
+              <a:t>ある日</a:t>
+            </a:r>
+            <a:r>
+              <a:rPr sz="3200" b="1" dirty="0" err="1">
+                <a:solidFill>
+                  <a:srgbClr val="374151"/>
+                </a:solidFill>
+              </a:rPr>
+              <a:t>のカンファで起きたこと</a:t>
+            </a:r>
+            <a:endParaRPr sz="3200" b="1" dirty="0">
+              <a:solidFill>
+                <a:srgbClr val="374151"/>
+              </a:solidFill>
+            </a:endParaRPr>
           </a:p>
         </p:txBody>
       </p:sp>
@@ -4099,6 +4143,7 @@
           <a:lstStyle/>
           <a:p>
             <a:pPr algn="ctr"/>
+            <a:endParaRPr sz="2000" dirty="0"/>
           </a:p>
         </p:txBody>
       </p:sp>
@@ -4111,27 +4156,35 @@
         <p:spPr>
           <a:xfrm>
             <a:off x="731520" y="2103120"/>
-            <a:ext cx="10698480" cy="457200"/>
-          </a:xfrm>
-          <a:prstGeom prst="rect">
-            <a:avLst/>
-          </a:prstGeom>
-          <a:noFill/>
-        </p:spPr>
-        <p:txBody>
-          <a:bodyPr wrap="square">
-            <a:spAutoFit/>
-          </a:bodyPr>
-          <a:lstStyle/>
-          <a:p>
-            <a:pPr algn="l"/>
-            <a:r>
-              <a:rPr sz="1600" b="1">
+            <a:ext cx="10698480" cy="369332"/>
+          </a:xfrm>
+          <a:prstGeom prst="rect">
+            <a:avLst/>
+          </a:prstGeom>
+          <a:noFill/>
+        </p:spPr>
+        <p:txBody>
+          <a:bodyPr wrap="square">
+            <a:spAutoFit/>
+          </a:bodyPr>
+          <a:lstStyle/>
+          <a:p>
+            <a:pPr algn="l"/>
+            <a:r>
+              <a:rPr b="1" dirty="0" err="1">
                 <a:solidFill>
                   <a:srgbClr val="6B7280"/>
                 </a:solidFill>
               </a:rPr>
-              <a:t>病棟の声:</a:t>
+              <a:t>病棟の声</a:t>
+            </a:r>
+            <a:r>
+              <a:rPr b="1" dirty="0">
+                <a:solidFill>
+                  <a:srgbClr val="6B7280"/>
+                </a:solidFill>
+              </a:rPr>
+              <a:t>:</a:t>
             </a:r>
           </a:p>
         </p:txBody>
@@ -4145,22 +4198,22 @@
         <p:spPr>
           <a:xfrm>
             <a:off x="914400" y="2560320"/>
-            <a:ext cx="10515600" cy="1371600"/>
-          </a:xfrm>
-          <a:prstGeom prst="rect">
-            <a:avLst/>
-          </a:prstGeom>
-          <a:noFill/>
-        </p:spPr>
-        <p:txBody>
-          <a:bodyPr wrap="square">
-            <a:spAutoFit/>
-          </a:bodyPr>
-          <a:lstStyle/>
-          <a:p>
-            <a:pPr algn="l"/>
-            <a:r>
-              <a:rPr sz="1600" b="0">
+            <a:ext cx="10515600" cy="923330"/>
+          </a:xfrm>
+          <a:prstGeom prst="rect">
+            <a:avLst/>
+          </a:prstGeom>
+          <a:noFill/>
+        </p:spPr>
+        <p:txBody>
+          <a:bodyPr wrap="square">
+            <a:spAutoFit/>
+          </a:bodyPr>
+          <a:lstStyle/>
+          <a:p>
+            <a:pPr algn="l"/>
+            <a:r>
+              <a:rPr b="0">
                 <a:solidFill>
                   <a:srgbClr val="1F2937"/>
                 </a:solidFill>
@@ -4171,7 +4224,7 @@
           <a:p>
             <a:pPr algn="l"/>
             <a:r>
-              <a:rPr sz="1600" b="0">
+              <a:rPr b="0">
                 <a:solidFill>
                   <a:srgbClr val="1F2937"/>
                 </a:solidFill>
@@ -4182,7 +4235,7 @@
           <a:p>
             <a:pPr algn="l"/>
             <a:r>
-              <a:rPr sz="1600" b="0">
+              <a:rPr b="0">
                 <a:solidFill>
                   <a:srgbClr val="1F2937"/>
                 </a:solidFill>
@@ -4303,7 +4356,7 @@
 </file>
 
 <file path=ppt/slides/slide3.xml><?xml version="1.0" encoding="utf-8"?>
-<p:sld xmlns:a="http://schemas.openxmlformats.org/drawingml/2006/main" xmlns:p="http://schemas.openxmlformats.org/presentationml/2006/main" xmlns:r="http://schemas.openxmlformats.org/officeDocument/2006/relationships">
+<p:sld xmlns:a="http://schemas.openxmlformats.org/drawingml/2006/main" xmlns:r="http://schemas.openxmlformats.org/officeDocument/2006/relationships" xmlns:p="http://schemas.openxmlformats.org/presentationml/2006/main">
   <p:cSld>
     <p:spTree>
       <p:nvGrpSpPr>
@@ -4311,7 +4364,14 @@
         <p:cNvGrpSpPr/>
         <p:nvPr/>
       </p:nvGrpSpPr>
-      <p:grpSpPr/>
+      <p:grpSpPr>
+        <a:xfrm>
+          <a:off x="0" y="0"/>
+          <a:ext cx="0" cy="0"/>
+          <a:chOff x="0" y="0"/>
+          <a:chExt cx="0" cy="0"/>
+        </a:xfrm>
+      </p:grpSpPr>
       <p:sp>
         <p:nvSpPr>
           <p:cNvPr id="2" name="TextBox 1"/>
@@ -4489,6 +4549,7 @@
           <a:lstStyle/>
           <a:p>
             <a:pPr algn="ctr"/>
+            <a:endParaRPr/>
           </a:p>
         </p:txBody>
       </p:sp>
@@ -4601,6 +4662,7 @@
           <a:lstStyle/>
           <a:p>
             <a:pPr algn="ctr"/>
+            <a:endParaRPr/>
           </a:p>
         </p:txBody>
       </p:sp>
@@ -4713,6 +4775,7 @@
           <a:lstStyle/>
           <a:p>
             <a:pPr algn="ctr"/>
+            <a:endParaRPr/>
           </a:p>
         </p:txBody>
       </p:sp>
@@ -4825,6 +4888,7 @@
           <a:lstStyle/>
           <a:p>
             <a:pPr algn="ctr"/>
+            <a:endParaRPr/>
           </a:p>
         </p:txBody>
       </p:sp>
@@ -4937,6 +5001,7 @@
           <a:lstStyle/>
           <a:p>
             <a:pPr algn="ctr"/>
+            <a:endParaRPr/>
           </a:p>
         </p:txBody>
       </p:sp>
@@ -5049,6 +5114,7 @@
           <a:lstStyle/>
           <a:p>
             <a:pPr algn="ctr"/>
+            <a:endParaRPr/>
           </a:p>
         </p:txBody>
       </p:sp>
@@ -5161,6 +5227,7 @@
           <a:lstStyle/>
           <a:p>
             <a:pPr algn="ctr"/>
+            <a:endParaRPr/>
           </a:p>
         </p:txBody>
       </p:sp>
@@ -5307,6 +5374,7 @@
           <a:lstStyle/>
           <a:p>
             <a:pPr algn="ctr"/>
+            <a:endParaRPr/>
           </a:p>
         </p:txBody>
       </p:sp>
@@ -5419,6 +5487,7 @@
           <a:lstStyle/>
           <a:p>
             <a:pPr algn="ctr"/>
+            <a:endParaRPr/>
           </a:p>
         </p:txBody>
       </p:sp>
@@ -5531,6 +5600,7 @@
           <a:lstStyle/>
           <a:p>
             <a:pPr algn="ctr"/>
+            <a:endParaRPr/>
           </a:p>
         </p:txBody>
       </p:sp>
@@ -5643,6 +5713,7 @@
           <a:lstStyle/>
           <a:p>
             <a:pPr algn="ctr"/>
+            <a:endParaRPr/>
           </a:p>
         </p:txBody>
       </p:sp>
@@ -5755,6 +5826,7 @@
           <a:lstStyle/>
           <a:p>
             <a:pPr algn="ctr"/>
+            <a:endParaRPr/>
           </a:p>
         </p:txBody>
       </p:sp>
@@ -5867,6 +5939,7 @@
           <a:lstStyle/>
           <a:p>
             <a:pPr algn="ctr"/>
+            <a:endParaRPr/>
           </a:p>
         </p:txBody>
       </p:sp>
@@ -5979,6 +6052,7 @@
           <a:lstStyle/>
           <a:p>
             <a:pPr algn="ctr"/>
+            <a:endParaRPr/>
           </a:p>
         </p:txBody>
       </p:sp>
@@ -6057,6 +6131,7 @@
           <a:lstStyle/>
           <a:p>
             <a:pPr algn="ctr"/>
+            <a:endParaRPr/>
           </a:p>
         </p:txBody>
       </p:sp>
@@ -6182,7 +6257,7 @@
 </file>
 
 <file path=ppt/slides/slide4.xml><?xml version="1.0" encoding="utf-8"?>
-<p:sld xmlns:a="http://schemas.openxmlformats.org/drawingml/2006/main" xmlns:p="http://schemas.openxmlformats.org/presentationml/2006/main" xmlns:r="http://schemas.openxmlformats.org/officeDocument/2006/relationships">
+<p:sld xmlns:a="http://schemas.openxmlformats.org/drawingml/2006/main" xmlns:r="http://schemas.openxmlformats.org/officeDocument/2006/relationships" xmlns:p="http://schemas.openxmlformats.org/presentationml/2006/main">
   <p:cSld>
     <p:spTree>
       <p:nvGrpSpPr>
@@ -6190,7 +6265,14 @@
         <p:cNvGrpSpPr/>
         <p:nvPr/>
       </p:nvGrpSpPr>
-      <p:grpSpPr/>
+      <p:grpSpPr>
+        <a:xfrm>
+          <a:off x="0" y="0"/>
+          <a:ext cx="0" cy="0"/>
+          <a:chOff x="0" y="0"/>
+          <a:chExt cx="0" cy="0"/>
+        </a:xfrm>
+      </p:grpSpPr>
       <p:sp>
         <p:nvSpPr>
           <p:cNvPr id="2" name="TextBox 1"/>
@@ -6268,6 +6350,7 @@
           <a:lstStyle/>
           <a:p>
             <a:pPr algn="ctr"/>
+            <a:endParaRPr/>
           </a:p>
         </p:txBody>
       </p:sp>
@@ -6416,6 +6499,7 @@
           <a:lstStyle/>
           <a:p>
             <a:pPr algn="ctr"/>
+            <a:endParaRPr/>
           </a:p>
         </p:txBody>
       </p:sp>
@@ -6564,6 +6648,7 @@
           <a:lstStyle/>
           <a:p>
             <a:pPr algn="ctr"/>
+            <a:endParaRPr/>
           </a:p>
         </p:txBody>
       </p:sp>
@@ -6678,7 +6763,7 @@
         <p:spPr>
           <a:xfrm>
             <a:off x="457200" y="3200400"/>
-            <a:ext cx="11247120" cy="457200"/>
+            <a:ext cx="11247120" cy="369332"/>
           </a:xfrm>
           <a:prstGeom prst="rect">
             <a:avLst/>
@@ -6693,12 +6778,52 @@
           <a:p>
             <a:pPr algn="ctr"/>
             <a:r>
-              <a:rPr sz="1800" b="1">
+              <a:rPr sz="1800" b="1" dirty="0" err="1">
                 <a:solidFill>
                   <a:srgbClr val="374151"/>
                 </a:solidFill>
               </a:rPr>
-              <a:t>直近の 8 名退院事件は「最大級」ではなく「よくある重なり」</a:t>
+              <a:t>直近の</a:t>
+            </a:r>
+            <a:r>
+              <a:rPr sz="1800" b="1" dirty="0">
+                <a:solidFill>
+                  <a:srgbClr val="374151"/>
+                </a:solidFill>
+              </a:rPr>
+              <a:t> 8 </a:t>
+            </a:r>
+            <a:r>
+              <a:rPr sz="1800" b="1" dirty="0" err="1">
+                <a:solidFill>
+                  <a:srgbClr val="374151"/>
+                </a:solidFill>
+              </a:rPr>
+              <a:t>名退院</a:t>
+            </a:r>
+            <a:r>
+              <a:rPr lang="ja-JP" altLang="en-US" sz="1800" b="1">
+                <a:solidFill>
+                  <a:srgbClr val="374151"/>
+                </a:solidFill>
+              </a:rPr>
+              <a:t>事象</a:t>
+            </a:r>
+            <a:r>
+              <a:rPr sz="1800" b="1" dirty="0" err="1">
+                <a:solidFill>
+                  <a:srgbClr val="374151"/>
+                </a:solidFill>
+              </a:rPr>
+              <a:t>は「最大級」ではなく「よくある重なり</a:t>
+            </a:r>
+            <a:r>
+              <a:rPr sz="1800" b="1" dirty="0">
+                <a:solidFill>
+                  <a:srgbClr val="374151"/>
+                </a:solidFill>
+              </a:rPr>
+              <a:t>」</a:t>
             </a:r>
           </a:p>
         </p:txBody>
@@ -6744,6 +6869,7 @@
           <a:lstStyle/>
           <a:p>
             <a:pPr algn="ctr"/>
+            <a:endParaRPr/>
           </a:p>
         </p:txBody>
       </p:sp>
@@ -6756,27 +6882,35 @@
         <p:spPr>
           <a:xfrm>
             <a:off x="731520" y="4023360"/>
-            <a:ext cx="10698480" cy="457200"/>
-          </a:xfrm>
-          <a:prstGeom prst="rect">
-            <a:avLst/>
-          </a:prstGeom>
-          <a:noFill/>
-        </p:spPr>
-        <p:txBody>
-          <a:bodyPr wrap="square">
-            <a:spAutoFit/>
-          </a:bodyPr>
-          <a:lstStyle/>
-          <a:p>
-            <a:pPr algn="l"/>
-            <a:r>
-              <a:rPr sz="1400" b="1">
+            <a:ext cx="10698480" cy="338554"/>
+          </a:xfrm>
+          <a:prstGeom prst="rect">
+            <a:avLst/>
+          </a:prstGeom>
+          <a:noFill/>
+        </p:spPr>
+        <p:txBody>
+          <a:bodyPr wrap="square">
+            <a:spAutoFit/>
+          </a:bodyPr>
+          <a:lstStyle/>
+          <a:p>
+            <a:pPr algn="l"/>
+            <a:r>
+              <a:rPr sz="1600" b="1" dirty="0" err="1">
                 <a:solidFill>
                   <a:srgbClr val="6B7280"/>
                 </a:solidFill>
               </a:rPr>
-              <a:t>超過が大きい日 TOP 5（年間）</a:t>
+              <a:t>超過が大きい日</a:t>
+            </a:r>
+            <a:r>
+              <a:rPr sz="1600" b="1" dirty="0">
+                <a:solidFill>
+                  <a:srgbClr val="6B7280"/>
+                </a:solidFill>
+              </a:rPr>
+              <a:t> TOP 5（年間）</a:t>
             </a:r>
           </a:p>
         </p:txBody>
@@ -6803,59 +6937,480 @@
           </a:bodyPr>
           <a:lstStyle/>
           <a:p>
-            <a:pPr algn="l"/>
-            <a:r>
-              <a:rPr sz="1300" b="0">
+            <a:r>
+              <a:rPr sz="1600" b="0" dirty="0">
                 <a:solidFill>
                   <a:srgbClr val="1F2937"/>
                 </a:solidFill>
               </a:rPr>
-              <a:t>🔴 2025-12-30 (火) 6F   退院 9 名 / 枠 5 → +4 超過</a:t>
-            </a:r>
-          </a:p>
-          <a:p>
-            <a:pPr algn="l"/>
-            <a:r>
-              <a:rPr sz="1300" b="0">
+              <a:t>🔴 2025-12-30 (</a:t>
+            </a:r>
+            <a:r>
+              <a:rPr sz="1600" b="0" dirty="0" err="1">
                 <a:solidFill>
                   <a:srgbClr val="1F2937"/>
                 </a:solidFill>
               </a:rPr>
-              <a:t>🔴 2026-01-27 (火) 6F   退院 9 名 / 枠 5 → +4 超過</a:t>
-            </a:r>
-          </a:p>
-          <a:p>
-            <a:pPr algn="l"/>
-            <a:r>
-              <a:rPr sz="1300" b="0">
+              <a:t>火</a:t>
+            </a:r>
+            <a:r>
+              <a:rPr sz="1600" b="0" dirty="0">
                 <a:solidFill>
                   <a:srgbClr val="1F2937"/>
                 </a:solidFill>
               </a:rPr>
-              <a:t>🟠 2025-05-29 (木) 5F   退院 8 名 / 枠 5 → +3 超過</a:t>
-            </a:r>
-          </a:p>
-          <a:p>
-            <a:pPr algn="l"/>
-            <a:r>
-              <a:rPr sz="1300" b="0">
+              <a:t>) 6F   </a:t>
+            </a:r>
+            <a:r>
+              <a:rPr sz="1600" b="0" dirty="0" err="1">
                 <a:solidFill>
                   <a:srgbClr val="1F2937"/>
                 </a:solidFill>
               </a:rPr>
-              <a:t>🟠 2025-07-19 (土) 5F   退院 8 名 / 枠 5 → +3 超過</a:t>
-            </a:r>
-          </a:p>
-          <a:p>
-            <a:pPr algn="l"/>
-            <a:r>
-              <a:rPr sz="1300" b="0">
+              <a:t>退院</a:t>
+            </a:r>
+            <a:r>
+              <a:rPr sz="1600" b="0" dirty="0">
                 <a:solidFill>
                   <a:srgbClr val="1F2937"/>
                 </a:solidFill>
               </a:rPr>
-              <a:t>🟠 2026-02-17 (火) 6F   退院 8 名 / 枠 5 → +3 超過</a:t>
-            </a:r>
+              <a:t> </a:t>
+            </a:r>
+            <a:r>
+              <a:rPr lang="en-US" altLang="ja-JP" sz="1600" dirty="0">
+                <a:solidFill>
+                  <a:srgbClr val="FF0000"/>
+                </a:solidFill>
+              </a:rPr>
+              <a:t>9 </a:t>
+            </a:r>
+            <a:r>
+              <a:rPr lang="ja-JP" altLang="en-US" sz="1600">
+                <a:solidFill>
+                  <a:srgbClr val="FF0000"/>
+                </a:solidFill>
+              </a:rPr>
+              <a:t>名</a:t>
+            </a:r>
+            <a:r>
+              <a:rPr sz="1600" b="0" dirty="0">
+                <a:solidFill>
+                  <a:srgbClr val="1F2937"/>
+                </a:solidFill>
+              </a:rPr>
+              <a:t>/ </a:t>
+            </a:r>
+            <a:r>
+              <a:rPr sz="1600" b="0" dirty="0" err="1">
+                <a:solidFill>
+                  <a:srgbClr val="1F2937"/>
+                </a:solidFill>
+              </a:rPr>
+              <a:t>枠</a:t>
+            </a:r>
+            <a:r>
+              <a:rPr sz="1600" b="0" dirty="0">
+                <a:solidFill>
+                  <a:srgbClr val="1F2937"/>
+                </a:solidFill>
+              </a:rPr>
+              <a:t> 5 → +4 </a:t>
+            </a:r>
+            <a:r>
+              <a:rPr sz="1600" b="0" dirty="0" err="1">
+                <a:solidFill>
+                  <a:srgbClr val="1F2937"/>
+                </a:solidFill>
+              </a:rPr>
+              <a:t>超過</a:t>
+            </a:r>
+            <a:endParaRPr sz="1600" b="0" dirty="0">
+              <a:solidFill>
+                <a:srgbClr val="1F2937"/>
+              </a:solidFill>
+            </a:endParaRPr>
+          </a:p>
+          <a:p>
+            <a:r>
+              <a:rPr sz="1600" b="0" dirty="0">
+                <a:solidFill>
+                  <a:srgbClr val="1F2937"/>
+                </a:solidFill>
+              </a:rPr>
+              <a:t>🔴 2026-01-27 (</a:t>
+            </a:r>
+            <a:r>
+              <a:rPr sz="1600" b="0" dirty="0" err="1">
+                <a:solidFill>
+                  <a:srgbClr val="1F2937"/>
+                </a:solidFill>
+              </a:rPr>
+              <a:t>火</a:t>
+            </a:r>
+            <a:r>
+              <a:rPr sz="1600" b="0" dirty="0">
+                <a:solidFill>
+                  <a:srgbClr val="1F2937"/>
+                </a:solidFill>
+              </a:rPr>
+              <a:t>) 6F   </a:t>
+            </a:r>
+            <a:r>
+              <a:rPr sz="1600" b="0" dirty="0" err="1">
+                <a:solidFill>
+                  <a:srgbClr val="1F2937"/>
+                </a:solidFill>
+              </a:rPr>
+              <a:t>退院</a:t>
+            </a:r>
+            <a:r>
+              <a:rPr sz="1600" b="0" dirty="0">
+                <a:solidFill>
+                  <a:srgbClr val="1F2937"/>
+                </a:solidFill>
+              </a:rPr>
+              <a:t> </a:t>
+            </a:r>
+            <a:r>
+              <a:rPr sz="1600" b="0" dirty="0">
+                <a:solidFill>
+                  <a:srgbClr val="FF0000"/>
+                </a:solidFill>
+              </a:rPr>
+              <a:t>9 </a:t>
+            </a:r>
+            <a:r>
+              <a:rPr sz="1600" b="0" dirty="0" err="1">
+                <a:solidFill>
+                  <a:srgbClr val="FF0000"/>
+                </a:solidFill>
+              </a:rPr>
+              <a:t>名</a:t>
+            </a:r>
+            <a:r>
+              <a:rPr sz="1600" b="0" dirty="0">
+                <a:solidFill>
+                  <a:srgbClr val="1F2937"/>
+                </a:solidFill>
+              </a:rPr>
+              <a:t> / </a:t>
+            </a:r>
+            <a:r>
+              <a:rPr sz="1600" b="0" dirty="0" err="1">
+                <a:solidFill>
+                  <a:srgbClr val="1F2937"/>
+                </a:solidFill>
+              </a:rPr>
+              <a:t>枠</a:t>
+            </a:r>
+            <a:r>
+              <a:rPr sz="1600" b="0" dirty="0">
+                <a:solidFill>
+                  <a:srgbClr val="1F2937"/>
+                </a:solidFill>
+              </a:rPr>
+              <a:t> 5 → +4 </a:t>
+            </a:r>
+            <a:r>
+              <a:rPr sz="1600" b="0" dirty="0" err="1">
+                <a:solidFill>
+                  <a:srgbClr val="1F2937"/>
+                </a:solidFill>
+              </a:rPr>
+              <a:t>超過</a:t>
+            </a:r>
+            <a:endParaRPr sz="1600" b="0" dirty="0">
+              <a:solidFill>
+                <a:srgbClr val="1F2937"/>
+              </a:solidFill>
+            </a:endParaRPr>
+          </a:p>
+          <a:p>
+            <a:r>
+              <a:rPr sz="1600" b="0" dirty="0">
+                <a:solidFill>
+                  <a:srgbClr val="1F2937"/>
+                </a:solidFill>
+              </a:rPr>
+              <a:t>🟠 2025-05-29 (</a:t>
+            </a:r>
+            <a:r>
+              <a:rPr sz="1600" b="0" dirty="0" err="1">
+                <a:solidFill>
+                  <a:srgbClr val="1F2937"/>
+                </a:solidFill>
+              </a:rPr>
+              <a:t>木</a:t>
+            </a:r>
+            <a:r>
+              <a:rPr sz="1600" b="0" dirty="0">
+                <a:solidFill>
+                  <a:srgbClr val="1F2937"/>
+                </a:solidFill>
+              </a:rPr>
+              <a:t>) 5F   </a:t>
+            </a:r>
+            <a:r>
+              <a:rPr sz="1600" b="0" dirty="0" err="1">
+                <a:solidFill>
+                  <a:srgbClr val="1F2937"/>
+                </a:solidFill>
+              </a:rPr>
+              <a:t>退院</a:t>
+            </a:r>
+            <a:r>
+              <a:rPr sz="1600" b="0" dirty="0">
+                <a:solidFill>
+                  <a:srgbClr val="1F2937"/>
+                </a:solidFill>
+              </a:rPr>
+              <a:t> </a:t>
+            </a:r>
+            <a:r>
+              <a:rPr lang="en-US" altLang="ja-JP" sz="1600" dirty="0">
+                <a:solidFill>
+                  <a:srgbClr val="FF0000"/>
+                </a:solidFill>
+              </a:rPr>
+              <a:t>8 </a:t>
+            </a:r>
+            <a:r>
+              <a:rPr lang="ja-JP" altLang="en-US" sz="1600">
+                <a:solidFill>
+                  <a:srgbClr val="FF0000"/>
+                </a:solidFill>
+              </a:rPr>
+              <a:t>名</a:t>
+            </a:r>
+            <a:r>
+              <a:rPr sz="1600" b="0" dirty="0">
+                <a:solidFill>
+                  <a:srgbClr val="1F2937"/>
+                </a:solidFill>
+              </a:rPr>
+              <a:t>/ </a:t>
+            </a:r>
+            <a:r>
+              <a:rPr sz="1600" b="0" dirty="0" err="1">
+                <a:solidFill>
+                  <a:srgbClr val="1F2937"/>
+                </a:solidFill>
+              </a:rPr>
+              <a:t>枠</a:t>
+            </a:r>
+            <a:r>
+              <a:rPr sz="1600" b="0" dirty="0">
+                <a:solidFill>
+                  <a:srgbClr val="1F2937"/>
+                </a:solidFill>
+              </a:rPr>
+              <a:t> 5 → +3 </a:t>
+            </a:r>
+            <a:r>
+              <a:rPr sz="1600" b="0" dirty="0" err="1">
+                <a:solidFill>
+                  <a:srgbClr val="1F2937"/>
+                </a:solidFill>
+              </a:rPr>
+              <a:t>超過</a:t>
+            </a:r>
+            <a:endParaRPr sz="1600" b="0" dirty="0">
+              <a:solidFill>
+                <a:srgbClr val="1F2937"/>
+              </a:solidFill>
+            </a:endParaRPr>
+          </a:p>
+          <a:p>
+            <a:r>
+              <a:rPr sz="1600" b="0" dirty="0">
+                <a:solidFill>
+                  <a:srgbClr val="1F2937"/>
+                </a:solidFill>
+              </a:rPr>
+              <a:t>🟠 2025-07-19 (</a:t>
+            </a:r>
+            <a:r>
+              <a:rPr sz="1600" b="0" dirty="0" err="1">
+                <a:solidFill>
+                  <a:srgbClr val="1F2937"/>
+                </a:solidFill>
+              </a:rPr>
+              <a:t>土</a:t>
+            </a:r>
+            <a:r>
+              <a:rPr sz="1600" b="0" dirty="0">
+                <a:solidFill>
+                  <a:srgbClr val="1F2937"/>
+                </a:solidFill>
+              </a:rPr>
+              <a:t>) 5F   </a:t>
+            </a:r>
+            <a:r>
+              <a:rPr sz="1600" b="0" dirty="0" err="1">
+                <a:solidFill>
+                  <a:srgbClr val="1F2937"/>
+                </a:solidFill>
+              </a:rPr>
+              <a:t>退院</a:t>
+            </a:r>
+            <a:r>
+              <a:rPr sz="1600" b="0" dirty="0">
+                <a:solidFill>
+                  <a:srgbClr val="1F2937"/>
+                </a:solidFill>
+              </a:rPr>
+              <a:t> </a:t>
+            </a:r>
+            <a:r>
+              <a:rPr sz="1600" b="0" dirty="0">
+                <a:solidFill>
+                  <a:srgbClr val="FF0000"/>
+                </a:solidFill>
+              </a:rPr>
+              <a:t>8 </a:t>
+            </a:r>
+            <a:r>
+              <a:rPr sz="1600" b="0" dirty="0" err="1">
+                <a:solidFill>
+                  <a:srgbClr val="FF0000"/>
+                </a:solidFill>
+              </a:rPr>
+              <a:t>名</a:t>
+            </a:r>
+            <a:r>
+              <a:rPr sz="1600" b="0" dirty="0">
+                <a:solidFill>
+                  <a:srgbClr val="1F2937"/>
+                </a:solidFill>
+              </a:rPr>
+              <a:t> / </a:t>
+            </a:r>
+            <a:r>
+              <a:rPr sz="1600" b="0" dirty="0" err="1">
+                <a:solidFill>
+                  <a:srgbClr val="1F2937"/>
+                </a:solidFill>
+              </a:rPr>
+              <a:t>枠</a:t>
+            </a:r>
+            <a:r>
+              <a:rPr sz="1600" b="0" dirty="0">
+                <a:solidFill>
+                  <a:srgbClr val="1F2937"/>
+                </a:solidFill>
+              </a:rPr>
+              <a:t> 5 → +3 </a:t>
+            </a:r>
+            <a:r>
+              <a:rPr sz="1600" b="0" dirty="0" err="1">
+                <a:solidFill>
+                  <a:srgbClr val="1F2937"/>
+                </a:solidFill>
+              </a:rPr>
+              <a:t>超過</a:t>
+            </a:r>
+            <a:endParaRPr sz="1600" b="0" dirty="0">
+              <a:solidFill>
+                <a:srgbClr val="1F2937"/>
+              </a:solidFill>
+            </a:endParaRPr>
+          </a:p>
+          <a:p>
+            <a:pPr algn="l"/>
+            <a:r>
+              <a:rPr sz="1600" b="0" dirty="0">
+                <a:solidFill>
+                  <a:srgbClr val="1F2937"/>
+                </a:solidFill>
+              </a:rPr>
+              <a:t>🟠 2026-02-17 (</a:t>
+            </a:r>
+            <a:r>
+              <a:rPr sz="1600" b="0" dirty="0" err="1">
+                <a:solidFill>
+                  <a:srgbClr val="1F2937"/>
+                </a:solidFill>
+              </a:rPr>
+              <a:t>火</a:t>
+            </a:r>
+            <a:r>
+              <a:rPr sz="1600" b="0" dirty="0">
+                <a:solidFill>
+                  <a:srgbClr val="1F2937"/>
+                </a:solidFill>
+              </a:rPr>
+              <a:t>) 6F   </a:t>
+            </a:r>
+            <a:r>
+              <a:rPr sz="1600" b="0" dirty="0" err="1">
+                <a:solidFill>
+                  <a:srgbClr val="1F2937"/>
+                </a:solidFill>
+              </a:rPr>
+              <a:t>退院</a:t>
+            </a:r>
+            <a:r>
+              <a:rPr sz="1600" b="0" dirty="0">
+                <a:solidFill>
+                  <a:srgbClr val="1F2937"/>
+                </a:solidFill>
+              </a:rPr>
+              <a:t> </a:t>
+            </a:r>
+            <a:r>
+              <a:rPr sz="1600" b="0" dirty="0">
+                <a:solidFill>
+                  <a:srgbClr val="FF0000"/>
+                </a:solidFill>
+              </a:rPr>
+              <a:t>8 </a:t>
+            </a:r>
+            <a:r>
+              <a:rPr sz="1600" b="0" dirty="0" err="1">
+                <a:solidFill>
+                  <a:srgbClr val="FF0000"/>
+                </a:solidFill>
+              </a:rPr>
+              <a:t>名</a:t>
+            </a:r>
+            <a:r>
+              <a:rPr sz="1600" b="0" dirty="0">
+                <a:solidFill>
+                  <a:srgbClr val="1F2937"/>
+                </a:solidFill>
+              </a:rPr>
+              <a:t> / </a:t>
+            </a:r>
+            <a:r>
+              <a:rPr sz="1600" b="0" dirty="0" err="1">
+                <a:solidFill>
+                  <a:srgbClr val="1F2937"/>
+                </a:solidFill>
+              </a:rPr>
+              <a:t>枠</a:t>
+            </a:r>
+            <a:r>
+              <a:rPr sz="1600" b="0" dirty="0">
+                <a:solidFill>
+                  <a:srgbClr val="1F2937"/>
+                </a:solidFill>
+              </a:rPr>
+              <a:t> 5 → +3 </a:t>
+            </a:r>
+            <a:r>
+              <a:rPr sz="1600" b="0" dirty="0" err="1">
+                <a:solidFill>
+                  <a:srgbClr val="1F2937"/>
+                </a:solidFill>
+              </a:rPr>
+              <a:t>超過</a:t>
+            </a:r>
+            <a:endParaRPr sz="1600" b="0" dirty="0">
+              <a:solidFill>
+                <a:srgbClr val="1F2937"/>
+              </a:solidFill>
+            </a:endParaRPr>
           </a:p>
         </p:txBody>
       </p:sp>
@@ -6902,7 +7457,7 @@
 </file>
 
 <file path=ppt/slides/slide5.xml><?xml version="1.0" encoding="utf-8"?>
-<p:sld xmlns:a="http://schemas.openxmlformats.org/drawingml/2006/main" xmlns:p="http://schemas.openxmlformats.org/presentationml/2006/main" xmlns:r="http://schemas.openxmlformats.org/officeDocument/2006/relationships">
+<p:sld xmlns:a="http://schemas.openxmlformats.org/drawingml/2006/main" xmlns:r="http://schemas.openxmlformats.org/officeDocument/2006/relationships" xmlns:p="http://schemas.openxmlformats.org/presentationml/2006/main">
   <p:cSld>
     <p:spTree>
       <p:nvGrpSpPr>
@@ -6910,7 +7465,14 @@
         <p:cNvGrpSpPr/>
         <p:nvPr/>
       </p:nvGrpSpPr>
-      <p:grpSpPr/>
+      <p:grpSpPr>
+        <a:xfrm>
+          <a:off x="0" y="0"/>
+          <a:ext cx="0" cy="0"/>
+          <a:chOff x="0" y="0"/>
+          <a:chExt cx="0" cy="0"/>
+        </a:xfrm>
+      </p:grpSpPr>
       <p:sp>
         <p:nvSpPr>
           <p:cNvPr id="2" name="TextBox 1"/>
@@ -7020,6 +7582,7 @@
           <a:lstStyle/>
           <a:p>
             <a:pPr algn="ctr"/>
+            <a:endParaRPr/>
           </a:p>
         </p:txBody>
       </p:sp>
@@ -7358,7 +7921,7 @@
 </file>
 
 <file path=ppt/slides/slide6.xml><?xml version="1.0" encoding="utf-8"?>
-<p:sld xmlns:a="http://schemas.openxmlformats.org/drawingml/2006/main" xmlns:p="http://schemas.openxmlformats.org/presentationml/2006/main" xmlns:r="http://schemas.openxmlformats.org/officeDocument/2006/relationships">
+<p:sld xmlns:a="http://schemas.openxmlformats.org/drawingml/2006/main" xmlns:r="http://schemas.openxmlformats.org/officeDocument/2006/relationships" xmlns:p="http://schemas.openxmlformats.org/presentationml/2006/main">
   <p:cSld>
     <p:spTree>
       <p:nvGrpSpPr>
@@ -7366,7 +7929,14 @@
         <p:cNvGrpSpPr/>
         <p:nvPr/>
       </p:nvGrpSpPr>
-      <p:grpSpPr/>
+      <p:grpSpPr>
+        <a:xfrm>
+          <a:off x="0" y="0"/>
+          <a:ext cx="0" cy="0"/>
+          <a:chOff x="0" y="0"/>
+          <a:chExt cx="0" cy="0"/>
+        </a:xfrm>
+      </p:grpSpPr>
       <p:sp>
         <p:nvSpPr>
           <p:cNvPr id="2" name="TextBox 1"/>
@@ -7476,6 +8046,7 @@
           <a:lstStyle/>
           <a:p>
             <a:pPr algn="ctr"/>
+            <a:endParaRPr/>
           </a:p>
         </p:txBody>
       </p:sp>
@@ -7612,6 +8183,7 @@
           <a:lstStyle/>
           <a:p>
             <a:pPr algn="ctr"/>
+            <a:endParaRPr/>
           </a:p>
         </p:txBody>
       </p:sp>
@@ -7760,6 +8332,7 @@
           <a:lstStyle/>
           <a:p>
             <a:pPr algn="ctr"/>
+            <a:endParaRPr/>
           </a:p>
         </p:txBody>
       </p:sp>
@@ -7908,6 +8481,7 @@
           <a:lstStyle/>
           <a:p>
             <a:pPr algn="ctr"/>
+            <a:endParaRPr/>
           </a:p>
         </p:txBody>
       </p:sp>
@@ -8090,7 +8664,7 @@
 </file>
 
 <file path=ppt/slides/slide7.xml><?xml version="1.0" encoding="utf-8"?>
-<p:sld xmlns:a="http://schemas.openxmlformats.org/drawingml/2006/main" xmlns:p="http://schemas.openxmlformats.org/presentationml/2006/main" xmlns:r="http://schemas.openxmlformats.org/officeDocument/2006/relationships">
+<p:sld xmlns:a="http://schemas.openxmlformats.org/drawingml/2006/main" xmlns:r="http://schemas.openxmlformats.org/officeDocument/2006/relationships" xmlns:p="http://schemas.openxmlformats.org/presentationml/2006/main">
   <p:cSld>
     <p:spTree>
       <p:nvGrpSpPr>
@@ -8098,7 +8672,14 @@
         <p:cNvGrpSpPr/>
         <p:nvPr/>
       </p:nvGrpSpPr>
-      <p:grpSpPr/>
+      <p:grpSpPr>
+        <a:xfrm>
+          <a:off x="0" y="0"/>
+          <a:ext cx="0" cy="0"/>
+          <a:chOff x="0" y="0"/>
+          <a:chExt cx="0" cy="0"/>
+        </a:xfrm>
+      </p:grpSpPr>
       <p:sp>
         <p:nvSpPr>
           <p:cNvPr id="2" name="TextBox 1"/>
@@ -8210,6 +8791,7 @@
           <a:lstStyle/>
           <a:p>
             <a:pPr algn="ctr"/>
+            <a:endParaRPr/>
           </a:p>
         </p:txBody>
       </p:sp>
@@ -8392,6 +8974,7 @@
           <a:lstStyle/>
           <a:p>
             <a:pPr algn="ctr"/>
+            <a:endParaRPr/>
           </a:p>
         </p:txBody>
       </p:sp>
@@ -8574,6 +9157,7 @@
           <a:lstStyle/>
           <a:p>
             <a:pPr algn="ctr"/>
+            <a:endParaRPr/>
           </a:p>
         </p:txBody>
       </p:sp>
@@ -8788,6 +9372,7 @@
           <a:lstStyle/>
           <a:p>
             <a:pPr algn="ctr"/>
+            <a:endParaRPr/>
           </a:p>
         </p:txBody>
       </p:sp>
@@ -8946,7 +9531,7 @@
 </file>
 
 <file path=ppt/slides/slide8.xml><?xml version="1.0" encoding="utf-8"?>
-<p:sld xmlns:a="http://schemas.openxmlformats.org/drawingml/2006/main" xmlns:p="http://schemas.openxmlformats.org/presentationml/2006/main" xmlns:r="http://schemas.openxmlformats.org/officeDocument/2006/relationships">
+<p:sld xmlns:a="http://schemas.openxmlformats.org/drawingml/2006/main" xmlns:r="http://schemas.openxmlformats.org/officeDocument/2006/relationships" xmlns:p="http://schemas.openxmlformats.org/presentationml/2006/main">
   <p:cSld>
     <p:spTree>
       <p:nvGrpSpPr>
@@ -8954,7 +9539,14 @@
         <p:cNvGrpSpPr/>
         <p:nvPr/>
       </p:nvGrpSpPr>
-      <p:grpSpPr/>
+      <p:grpSpPr>
+        <a:xfrm>
+          <a:off x="0" y="0"/>
+          <a:ext cx="0" cy="0"/>
+          <a:chOff x="0" y="0"/>
+          <a:chExt cx="0" cy="0"/>
+        </a:xfrm>
+      </p:grpSpPr>
       <p:sp>
         <p:nvSpPr>
           <p:cNvPr id="2" name="TextBox 1"/>
@@ -9032,6 +9624,7 @@
           <a:lstStyle/>
           <a:p>
             <a:pPr algn="ctr"/>
+            <a:endParaRPr/>
           </a:p>
         </p:txBody>
       </p:sp>
@@ -9146,6 +9739,7 @@
           <a:lstStyle/>
           <a:p>
             <a:pPr algn="ctr"/>
+            <a:endParaRPr/>
           </a:p>
         </p:txBody>
       </p:sp>
@@ -9260,6 +9854,7 @@
           <a:lstStyle/>
           <a:p>
             <a:pPr algn="ctr"/>
+            <a:endParaRPr/>
           </a:p>
         </p:txBody>
       </p:sp>
@@ -9374,6 +9969,7 @@
           <a:lstStyle/>
           <a:p>
             <a:pPr algn="ctr"/>
+            <a:endParaRPr/>
           </a:p>
         </p:txBody>
       </p:sp>
@@ -9488,6 +10084,7 @@
           <a:lstStyle/>
           <a:p>
             <a:pPr algn="ctr"/>
+            <a:endParaRPr/>
           </a:p>
         </p:txBody>
       </p:sp>
@@ -9602,7 +10199,7 @@
 </file>
 
 <file path=ppt/slides/slide9.xml><?xml version="1.0" encoding="utf-8"?>
-<p:sld xmlns:a="http://schemas.openxmlformats.org/drawingml/2006/main" xmlns:p="http://schemas.openxmlformats.org/presentationml/2006/main" xmlns:r="http://schemas.openxmlformats.org/officeDocument/2006/relationships">
+<p:sld xmlns:a="http://schemas.openxmlformats.org/drawingml/2006/main" xmlns:r="http://schemas.openxmlformats.org/officeDocument/2006/relationships" xmlns:p="http://schemas.openxmlformats.org/presentationml/2006/main">
   <p:cSld>
     <p:spTree>
       <p:nvGrpSpPr>
@@ -9610,7 +10207,14 @@
         <p:cNvGrpSpPr/>
         <p:nvPr/>
       </p:nvGrpSpPr>
-      <p:grpSpPr/>
+      <p:grpSpPr>
+        <a:xfrm>
+          <a:off x="0" y="0"/>
+          <a:ext cx="0" cy="0"/>
+          <a:chOff x="0" y="0"/>
+          <a:chExt cx="0" cy="0"/>
+        </a:xfrm>
+      </p:grpSpPr>
       <p:sp>
         <p:nvSpPr>
           <p:cNvPr id="2" name="TextBox 1"/>
@@ -9720,6 +10324,7 @@
           <a:lstStyle/>
           <a:p>
             <a:pPr algn="ctr"/>
+            <a:endParaRPr/>
           </a:p>
         </p:txBody>
       </p:sp>
@@ -9798,6 +10403,7 @@
           <a:lstStyle/>
           <a:p>
             <a:pPr algn="ctr"/>
+            <a:endParaRPr/>
           </a:p>
         </p:txBody>
       </p:sp>
@@ -9910,6 +10516,7 @@
           <a:lstStyle/>
           <a:p>
             <a:pPr algn="ctr"/>
+            <a:endParaRPr/>
           </a:p>
         </p:txBody>
       </p:sp>
@@ -9988,6 +10595,7 @@
           <a:lstStyle/>
           <a:p>
             <a:pPr algn="ctr"/>
+            <a:endParaRPr/>
           </a:p>
         </p:txBody>
       </p:sp>
@@ -10100,6 +10708,7 @@
           <a:lstStyle/>
           <a:p>
             <a:pPr algn="ctr"/>
+            <a:endParaRPr/>
           </a:p>
         </p:txBody>
       </p:sp>
@@ -10178,6 +10787,7 @@
           <a:lstStyle/>
           <a:p>
             <a:pPr algn="ctr"/>
+            <a:endParaRPr/>
           </a:p>
         </p:txBody>
       </p:sp>
@@ -10290,6 +10900,7 @@
           <a:lstStyle/>
           <a:p>
             <a:pPr algn="ctr"/>
+            <a:endParaRPr/>
           </a:p>
         </p:txBody>
       </p:sp>
@@ -10368,6 +10979,7 @@
           <a:lstStyle/>
           <a:p>
             <a:pPr algn="ctr"/>
+            <a:endParaRPr/>
           </a:p>
         </p:txBody>
       </p:sp>
@@ -10480,6 +11092,7 @@
           <a:lstStyle/>
           <a:p>
             <a:pPr algn="ctr"/>
+            <a:endParaRPr/>
           </a:p>
         </p:txBody>
       </p:sp>
@@ -10558,6 +11171,7 @@
           <a:lstStyle/>
           <a:p>
             <a:pPr algn="ctr"/>
+            <a:endParaRPr/>
           </a:p>
         </p:txBody>
       </p:sp>
